--- a/project1/presentation/Singapore_Jobs_Explorer_Redesign.pptx
+++ b/project1/presentation/Singapore_Jobs_Explorer_Redesign.pptx
@@ -125,14 +125,14 @@
   <p:extLst>
     <p:ext uri="{521415D9-36F7-43E2-AB2F-B90AF26B5E84}">
       <p14:sectionLst xmlns:p14="http://schemas.microsoft.com/office/powerpoint/2010/main">
-        <p14:section name="Introduction" id="{2475d8a4-0d71-3408-5ff3-4218c76e035f}">
+        <p14:section name="Introduction" id="{90555e8e-5ff1-7f13-4c88-457b622346e1}">
           <p14:sldIdLst>
             <p14:sldId id="256"/>
             <p14:sldId id="257"/>
             <p14:sldId id="258"/>
           </p14:sldIdLst>
         </p14:section>
-        <p14:section name="Data" id="{51c2d37f-1337-df9c-7edf-4b70b7731ec8}">
+        <p14:section name="Data" id="{50a98388-24ab-bb56-3b1a-3bf240990e25}">
           <p14:sldIdLst>
             <p14:sldId id="259"/>
             <p14:sldId id="260"/>
@@ -140,14 +140,14 @@
             <p14:sldId id="262"/>
           </p14:sldIdLst>
         </p14:section>
-        <p14:section name="Findings" id="{56b48e08-46ad-f218-6cf2-305bbd9f3d7a}">
+        <p14:section name="Findings" id="{72ee7487-f1b5-9374-92b7-1cb59120b4d0}">
           <p14:sldIdLst>
             <p14:sldId id="263"/>
             <p14:sldId id="264"/>
             <p14:sldId id="265"/>
           </p14:sldIdLst>
         </p14:section>
-        <p14:section name="Dashboard" id="{4e0bc2ce-e52b-b6c5-51b3-6aeaadc00f71}">
+        <p14:section name="Dashboard" id="{faf91ae1-cfd0-ee7e-051c-8ef04259ce94}">
           <p14:sldIdLst>
             <p14:sldId id="266"/>
             <p14:sldId id="267"/>
@@ -156,14 +156,14 @@
             <p14:sldId id="270"/>
           </p14:sldIdLst>
         </p14:section>
-        <p14:section name="Close" id="{6ad0700e-0f2a-7889-b02c-d49cb6caedbf}">
+        <p14:section name="Close" id="{c24d0bd2-f079-7ff4-b5e5-85d3dfe61fb8}">
           <p14:sldIdLst>
             <p14:sldId id="271"/>
             <p14:sldId id="272"/>
             <p14:sldId id="273"/>
           </p14:sldIdLst>
         </p14:section>
-        <p14:section name="Appendix" id="{1e29cad3-e693-141b-f83b-b4510e29d043}">
+        <p14:section name="Appendix" id="{18fd30b4-cd03-79af-6690-a4f00b362be4}">
           <p14:sldIdLst>
             <p14:sldId id="274"/>
           </p14:sldIdLst>
@@ -1775,7 +1775,7 @@
           <a:p>
             <a:r>
               <a:rPr lang="en-US" dirty="0"/>
-              <a:t>Speaker 1 opens. Say: Good [morning/afternoon]. We are Group 7, and we built the Singapore Jobs Explorer.</a:t>
+              <a:t>Speaker 1 opens. Say: Good [morning/afternoon]. We are Team 2, and we built the Singapore Jobs Explorer.</a:t>
             </a:r>
             <a:endParaRPr lang="en-US" dirty="0"/>
           </a:p>
@@ -3843,7 +3843,7 @@
                 <a:ea typeface="+mn-lt" pitchFamily="34" charset="-122"/>
                 <a:cs typeface="+mn-lt" pitchFamily="34" charset="-120"/>
               </a:rPr>
-              <a:t>Group 7  ·  10-minute presentation</a:t>
+              <a:t>Team 2  ·  10-minute presentation</a:t>
             </a:r>
             <a:endParaRPr lang="en-US" sz="1600" dirty="0"/>
           </a:p>
